--- a/docs/AAKI-Overview-Presentation.pptx
+++ b/docs/AAKI-Overview-Presentation.pptx
@@ -320,7 +320,7 @@
           <a:p>
             <a:fld id="{241EB5C9-1307-BA42-ABA2-0BC069CD8E7F}" type="datetimeFigureOut">
               <a:rPr lang="en-US" smtClean="0"/>
-              <a:t>7/14/26</a:t>
+              <a:t>8/10/26</a:t>
             </a:fld>
             <a:endParaRPr lang="en-US"/>
           </a:p>
@@ -488,7 +488,7 @@
           <a:p>
             <a:fld id="{241EB5C9-1307-BA42-ABA2-0BC069CD8E7F}" type="datetimeFigureOut">
               <a:rPr lang="en-US" smtClean="0"/>
-              <a:t>7/14/26</a:t>
+              <a:t>8/10/26</a:t>
             </a:fld>
             <a:endParaRPr lang="en-US"/>
           </a:p>
@@ -666,7 +666,7 @@
           <a:p>
             <a:fld id="{241EB5C9-1307-BA42-ABA2-0BC069CD8E7F}" type="datetimeFigureOut">
               <a:rPr lang="en-US" smtClean="0"/>
-              <a:t>7/14/26</a:t>
+              <a:t>8/10/26</a:t>
             </a:fld>
             <a:endParaRPr lang="en-US"/>
           </a:p>
@@ -834,7 +834,7 @@
           <a:p>
             <a:fld id="{241EB5C9-1307-BA42-ABA2-0BC069CD8E7F}" type="datetimeFigureOut">
               <a:rPr lang="en-US" smtClean="0"/>
-              <a:t>7/14/26</a:t>
+              <a:t>8/10/26</a:t>
             </a:fld>
             <a:endParaRPr lang="en-US"/>
           </a:p>
@@ -1079,7 +1079,7 @@
           <a:p>
             <a:fld id="{241EB5C9-1307-BA42-ABA2-0BC069CD8E7F}" type="datetimeFigureOut">
               <a:rPr lang="en-US" smtClean="0"/>
-              <a:t>7/14/26</a:t>
+              <a:t>8/10/26</a:t>
             </a:fld>
             <a:endParaRPr lang="en-US"/>
           </a:p>
@@ -1364,7 +1364,7 @@
           <a:p>
             <a:fld id="{241EB5C9-1307-BA42-ABA2-0BC069CD8E7F}" type="datetimeFigureOut">
               <a:rPr lang="en-US" smtClean="0"/>
-              <a:t>7/14/26</a:t>
+              <a:t>8/10/26</a:t>
             </a:fld>
             <a:endParaRPr lang="en-US"/>
           </a:p>
@@ -1783,7 +1783,7 @@
           <a:p>
             <a:fld id="{241EB5C9-1307-BA42-ABA2-0BC069CD8E7F}" type="datetimeFigureOut">
               <a:rPr lang="en-US" smtClean="0"/>
-              <a:t>7/14/26</a:t>
+              <a:t>8/10/26</a:t>
             </a:fld>
             <a:endParaRPr lang="en-US"/>
           </a:p>
@@ -1900,7 +1900,7 @@
           <a:p>
             <a:fld id="{241EB5C9-1307-BA42-ABA2-0BC069CD8E7F}" type="datetimeFigureOut">
               <a:rPr lang="en-US" smtClean="0"/>
-              <a:t>7/14/26</a:t>
+              <a:t>8/10/26</a:t>
             </a:fld>
             <a:endParaRPr lang="en-US"/>
           </a:p>
@@ -1995,7 +1995,7 @@
           <a:p>
             <a:fld id="{241EB5C9-1307-BA42-ABA2-0BC069CD8E7F}" type="datetimeFigureOut">
               <a:rPr lang="en-US" smtClean="0"/>
-              <a:t>7/14/26</a:t>
+              <a:t>8/10/26</a:t>
             </a:fld>
             <a:endParaRPr lang="en-US"/>
           </a:p>
@@ -2270,7 +2270,7 @@
           <a:p>
             <a:fld id="{241EB5C9-1307-BA42-ABA2-0BC069CD8E7F}" type="datetimeFigureOut">
               <a:rPr lang="en-US" smtClean="0"/>
-              <a:t>7/14/26</a:t>
+              <a:t>8/10/26</a:t>
             </a:fld>
             <a:endParaRPr lang="en-US"/>
           </a:p>
@@ -2522,7 +2522,7 @@
           <a:p>
             <a:fld id="{241EB5C9-1307-BA42-ABA2-0BC069CD8E7F}" type="datetimeFigureOut">
               <a:rPr lang="en-US" smtClean="0"/>
-              <a:t>7/14/26</a:t>
+              <a:t>8/10/26</a:t>
             </a:fld>
             <a:endParaRPr lang="en-US"/>
           </a:p>
@@ -2733,7 +2733,7 @@
           <a:p>
             <a:fld id="{241EB5C9-1307-BA42-ABA2-0BC069CD8E7F}" type="datetimeFigureOut">
               <a:rPr lang="en-US" smtClean="0"/>
-              <a:t>7/14/26</a:t>
+              <a:t>8/10/26</a:t>
             </a:fld>
             <a:endParaRPr lang="en-US"/>
           </a:p>
@@ -3127,6 +3127,7 @@
               <a:buNone/>
             </a:pPr>
             <a:r>
+              <a:rPr dirty="0"/>
               <a:t>AI Assisted Knowledge Integration</a:t>
             </a:r>
           </a:p>
@@ -3389,7 +3390,15 @@
           <a:p>
             <a:r>
               <a:rPr dirty="0"/>
-              <a:t>Natural-language questions. Cross-domain queries. “What-if” analyses. Gap and coverage detection </a:t>
+              <a:t>Natural-language questions. Cross-domain queries. “What-if” analyses. </a:t>
+            </a:r>
+            <a:r>
+              <a:rPr lang="en-US" dirty="0"/>
+              <a:t>G</a:t>
+            </a:r>
+            <a:r>
+              <a:rPr dirty="0"/>
+              <a:t>ap and coverage detection </a:t>
             </a:r>
             <a:endParaRPr lang="en-US" dirty="0"/>
           </a:p>
@@ -3472,7 +3481,7 @@
 </file>
 
 <file path=ppt/slides/slide12.xml><?xml version="1.0" encoding="utf-8"?>
-<p:sld xmlns:a="http://schemas.openxmlformats.org/drawingml/2006/main" xmlns:r="http://schemas.openxmlformats.org/officeDocument/2006/relationships" xmlns:p="http://schemas.openxmlformats.org/presentationml/2006/main">
+<p:sld xmlns:a="http://schemas.openxmlformats.org/drawingml/2006/main" xmlns:r="http://schemas.openxmlformats.org/officeDocument/2006/relationships" xmlns:p="http://schemas.openxmlformats.org/presentationml/2006/main" show="0">
   <p:cSld>
     <p:spTree>
       <p:nvGrpSpPr>
@@ -4158,7 +4167,15 @@
             </a:r>
             <a:r>
               <a:rPr dirty="0"/>
-              <a:t> — mechanical operations under pre-authorized policy. </a:t>
+              <a:t> — mechanical operations under pre-authorized policy</a:t>
+            </a:r>
+            <a:r>
+              <a:rPr lang="en-US" dirty="0"/>
+              <a:t> captured in a change set for approval and delivery</a:t>
+            </a:r>
+            <a:r>
+              <a:rPr dirty="0"/>
+              <a:t>. </a:t>
             </a:r>
             <a:r>
               <a:rPr i="1" dirty="0"/>
@@ -4398,70 +4415,104 @@
               <a:buNone/>
             </a:pPr>
             <a:r>
+              <a:rPr dirty="0"/>
               <a:t>One node of a digital thread — the business-motivation domain, a real </a:t>
             </a:r>
             <a:r>
-              <a:rPr i="1"/>
+              <a:rPr i="1" dirty="0"/>
               <a:t>data-gap</a:t>
             </a:r>
             <a:r>
+              <a:rPr dirty="0"/>
               <a:t> fill.</a:t>
             </a:r>
           </a:p>
           <a:p>
             <a:pPr lvl="1"/>
             <a:r>
-              <a:rPr b="1"/>
+              <a:rPr b="1" dirty="0"/>
               <a:t>Define done.</a:t>
             </a:r>
             <a:r>
+              <a:rPr dirty="0"/>
               <a:t> The AI read the OMG Business Motivation Model 1.3 spec → </a:t>
             </a:r>
             <a:r>
-              <a:rPr>
+              <a:rPr dirty="0" err="1">
                 <a:latin typeface="Courier"/>
               </a:rPr>
               <a:t>BMM.ttl</a:t>
             </a:r>
             <a:r>
+              <a:rPr dirty="0"/>
               <a:t> + </a:t>
             </a:r>
             <a:r>
-              <a:rPr>
+              <a:rPr dirty="0">
                 <a:latin typeface="Courier"/>
               </a:rPr>
-              <a:t>BMM-Shapes.ttl</a:t>
-            </a:r>
-            <a:r>
-              <a:t> (25 classes, 49 properties, 14 ResourceShapes). </a:t>
-            </a:r>
-            <a:r>
-              <a:rPr>
+              <a:t>BMM-</a:t>
+            </a:r>
+            <a:r>
+              <a:rPr dirty="0" err="1">
                 <a:latin typeface="Courier"/>
               </a:rPr>
-              <a:t>create-oslc-server</a:t>
-            </a:r>
-            <a:r>
+              <a:t>Shapes.ttl</a:t>
+            </a:r>
+            <a:r>
+              <a:rPr dirty="0"/>
+              <a:t> (25 classes, 49 properties, 14 </a:t>
+            </a:r>
+            <a:r>
+              <a:rPr dirty="0" err="1"/>
+              <a:t>ResourceShapes</a:t>
+            </a:r>
+            <a:r>
+              <a:rPr dirty="0"/>
+              <a:t>). </a:t>
+            </a:r>
+            <a:r>
+              <a:rPr dirty="0">
+                <a:latin typeface="Courier"/>
+              </a:rPr>
+              <a:t>create-</a:t>
+            </a:r>
+            <a:r>
+              <a:rPr dirty="0" err="1">
+                <a:latin typeface="Courier"/>
+              </a:rPr>
+              <a:t>oslc</a:t>
+            </a:r>
+            <a:r>
+              <a:rPr dirty="0">
+                <a:latin typeface="Courier"/>
+              </a:rPr>
+              <a:t>-server</a:t>
+            </a:r>
+            <a:r>
+              <a:rPr dirty="0"/>
               <a:t> assembled a fully operational, AI-ready OSLC server.</a:t>
             </a:r>
           </a:p>
           <a:p>
             <a:pPr lvl="1"/>
             <a:r>
-              <a:rPr b="1"/>
+              <a:rPr b="1" dirty="0"/>
               <a:t>Instantiate runs live.</a:t>
             </a:r>
             <a:r>
+              <a:rPr dirty="0"/>
               <a:t> The AI populates EU-Rent — Vision, Goals, Strategies, Tactics, Influencers, Assessments, Policies — with cross-resource links, in minutes.</a:t>
             </a:r>
           </a:p>
           <a:p>
             <a:pPr lvl="1"/>
             <a:r>
-              <a:rPr b="1"/>
+              <a:rPr b="1" dirty="0"/>
               <a:t>Activate runs live.</a:t>
             </a:r>
             <a:r>
+              <a:rPr dirty="0"/>
               <a:t> “Which goals lack supporting tactics?” “Impact of revising Mission X?” — the AI traverses the OSLC graph and answers.</a:t>
             </a:r>
           </a:p>
@@ -4470,7 +4521,7 @@
               <a:buNone/>
             </a:pPr>
             <a:r>
-              <a:rPr sz="2000"/>
+              <a:rPr sz="2000" dirty="0"/>
               <a:t>Real shapes. Real OSLC server. Real MCP endpoints. Not slide-ware.</a:t>
             </a:r>
           </a:p>
@@ -5156,7 +5207,7 @@
         <p:spPr/>
         <p:txBody>
           <a:bodyPr>
-            <a:normAutofit lnSpcReduction="10000"/>
+            <a:normAutofit fontScale="92500" lnSpcReduction="10000"/>
           </a:bodyPr>
           <a:lstStyle/>
           <a:p>
@@ -5165,7 +5216,15 @@
             </a:pPr>
             <a:r>
               <a:rPr dirty="0"/>
-              <a:t>Seen as nodes and links, three gaps stand in the way</a:t>
+              <a:t>Seen as nodes and links, </a:t>
+            </a:r>
+            <a:r>
+              <a:rPr lang="en-US" dirty="0"/>
+              <a:t>four</a:t>
+            </a:r>
+            <a:r>
+              <a:rPr dirty="0"/>
+              <a:t> gaps stand in the way</a:t>
             </a:r>
             <a:r>
               <a:rPr lang="en-US" dirty="0"/>
@@ -5177,7 +5236,10 @@
             </a:r>
           </a:p>
           <a:p>
-            <a:pPr lvl="1"/>
+            <a:pPr marL="914400" lvl="1" indent="-457200">
+              <a:buFont typeface="+mj-lt"/>
+              <a:buAutoNum type="arabicPeriod"/>
+            </a:pPr>
             <a:r>
               <a:rPr b="1" dirty="0"/>
               <a:t>Missing links between nodes — the connectivity/traceability gap.</a:t>
@@ -5188,7 +5250,10 @@
             </a:r>
           </a:p>
           <a:p>
-            <a:pPr lvl="1"/>
+            <a:pPr marL="914400" lvl="1" indent="-457200">
+              <a:buFont typeface="+mj-lt"/>
+              <a:buAutoNum type="arabicPeriod"/>
+            </a:pPr>
             <a:r>
               <a:rPr b="1" dirty="0"/>
               <a:t>Missing domain nodes — the data gap.</a:t>
@@ -5215,7 +5280,10 @@
             </a:r>
           </a:p>
           <a:p>
-            <a:pPr lvl="1"/>
+            <a:pPr marL="914400" lvl="1" indent="-457200">
+              <a:buFont typeface="+mj-lt"/>
+              <a:buAutoNum type="arabicPeriod"/>
+            </a:pPr>
             <a:r>
               <a:rPr b="1" dirty="0"/>
               <a:t>Ungoverned evolution — the governance &amp; continuous-improvement gap.</a:t>
@@ -5240,6 +5308,22 @@
               <a:rPr dirty="0"/>
               <a:t>, and its conformance lives in episodic audits with no feedback loop. This is where the thread’s value is ultimately realized.</a:t>
             </a:r>
+            <a:endParaRPr lang="en-US" dirty="0"/>
+          </a:p>
+          <a:p>
+            <a:pPr marL="914400" lvl="1" indent="-457200">
+              <a:buFont typeface="+mj-lt"/>
+              <a:buAutoNum type="arabicPeriod"/>
+            </a:pPr>
+            <a:r>
+              <a:rPr lang="en-US" b="1" dirty="0"/>
+              <a:t>Configuration Management </a:t>
+            </a:r>
+            <a:r>
+              <a:rPr lang="en-US" dirty="0"/>
+              <a:t>– managing versions and configurations of all the contributions to the digital thread</a:t>
+            </a:r>
+            <a:endParaRPr dirty="0"/>
           </a:p>
         </p:txBody>
       </p:sp>
@@ -5392,7 +5476,15 @@
             </a:r>
             <a:r>
               <a:rPr dirty="0"/>
-              <a:t> questions and act on governed, trustworthy answers …</a:t>
+              <a:t> questions and act on </a:t>
+            </a:r>
+            <a:r>
+              <a:rPr lang="en-US" dirty="0"/>
+              <a:t>version aware, </a:t>
+            </a:r>
+            <a:r>
+              <a:rPr dirty="0"/>
+              <a:t>governed, trustworthy answers …</a:t>
             </a:r>
           </a:p>
           <a:p>
@@ -5520,7 +5612,7 @@
             <p:ph idx="1"/>
             <p:extLst>
               <p:ext uri="{D42A27DB-BD31-4B8C-83A1-F6EECF244321}">
-                <p14:modId xmlns:p14="http://schemas.microsoft.com/office/powerpoint/2010/main" val="3811291933"/>
+                <p14:modId xmlns:p14="http://schemas.microsoft.com/office/powerpoint/2010/main" val="1203396092"/>
               </p:ext>
             </p:extLst>
           </p:nvPr>
@@ -5800,6 +5892,11 @@
                         <a:rPr sz="1600" dirty="0"/>
                         <a:t> queries; AI drafts findings/ratings, humans own the rating</a:t>
                       </a:r>
+                      <a:r>
+                        <a:rPr lang="en-US" sz="1600" dirty="0"/>
+                        <a:t>, reducing compliance drift</a:t>
+                      </a:r>
+                      <a:endParaRPr sz="1600" dirty="0"/>
                     </a:p>
                   </a:txBody>
                   <a:tcPr/>
